--- a/Template/Charlas/Template Workshop.pptx
+++ b/Template/Charlas/Template Workshop.pptx
@@ -5,15 +5,16 @@
     <p:sldMasterId id="2147483648" r:id="rId1"/>
   </p:sldMasterIdLst>
   <p:notesMasterIdLst>
-    <p:notesMasterId r:id="rId5"/>
+    <p:notesMasterId r:id="rId6"/>
   </p:notesMasterIdLst>
   <p:handoutMasterIdLst>
-    <p:handoutMasterId r:id="rId6"/>
+    <p:handoutMasterId r:id="rId7"/>
   </p:handoutMasterIdLst>
   <p:sldIdLst>
     <p:sldId id="256" r:id="rId2"/>
     <p:sldId id="257" r:id="rId3"/>
-    <p:sldId id="258" r:id="rId4"/>
+    <p:sldId id="259" r:id="rId4"/>
+    <p:sldId id="258" r:id="rId5"/>
   </p:sldIdLst>
   <p:sldSz cx="18288000" cy="10287000"/>
   <p:notesSz cx="6858000" cy="9144000"/>
@@ -127,6 +128,9 @@
         </p15:guide>
       </p15:sldGuideLst>
     </p:ext>
+    <p:ext uri="{2D200454-40CA-4A62-9FC3-DE9A4176ACB9}">
+      <p15:notesGuideLst xmlns:p15="http://schemas.microsoft.com/office/powerpoint/2012/main"/>
+    </p:ext>
   </p:extLst>
 </p:presentation>
 </file>
@@ -225,7 +229,7 @@
           <a:p>
             <a:fld id="{45792F1D-7282-40AB-84B1-6A7683BB2DEF}" type="datetimeFigureOut">
               <a:rPr lang="en-US" smtClean="0"/>
-              <a:t>4/10/2026</a:t>
+              <a:t>4/12/2026</a:t>
             </a:fld>
             <a:endParaRPr lang="en-US"/>
           </a:p>
@@ -402,7 +406,7 @@
           <a:p>
             <a:fld id="{ED82B68F-8818-4C16-B2D9-A2B9D9512145}" type="datetimeFigureOut">
               <a:rPr lang="en-US" smtClean="0"/>
-              <a:t>4/10/2026</a:t>
+              <a:t>4/12/2026</a:t>
             </a:fld>
             <a:endParaRPr lang="en-US"/>
           </a:p>
@@ -1309,6 +1313,228 @@
 
 <file path=ppt/slideLayouts/slideLayout3.xml><?xml version="1.0" encoding="utf-8"?>
 <p:sldLayout xmlns:a="http://schemas.openxmlformats.org/drawingml/2006/main" xmlns:r="http://schemas.openxmlformats.org/officeDocument/2006/relationships" xmlns:p="http://schemas.openxmlformats.org/presentationml/2006/main" preserve="1" userDrawn="1">
+  <p:cSld name="1_Blank">
+    <p:spTree>
+      <p:nvGrpSpPr>
+        <p:cNvPr id="1" name=""/>
+        <p:cNvGrpSpPr/>
+        <p:nvPr/>
+      </p:nvGrpSpPr>
+      <p:grpSpPr>
+        <a:xfrm>
+          <a:off x="0" y="0"/>
+          <a:ext cx="0" cy="0"/>
+          <a:chOff x="0" y="0"/>
+          <a:chExt cx="0" cy="0"/>
+        </a:xfrm>
+      </p:grpSpPr>
+      <p:sp>
+        <p:nvSpPr>
+          <p:cNvPr id="8" name="Subtitle 2">
+            <a:extLst>
+              <a:ext uri="{FF2B5EF4-FFF2-40B4-BE49-F238E27FC236}">
+                <a16:creationId xmlns:a16="http://schemas.microsoft.com/office/drawing/2014/main" id="{A7E6AC6A-8A1C-3E16-8CB7-FB149FF6E6E7}"/>
+              </a:ext>
+            </a:extLst>
+          </p:cNvPr>
+          <p:cNvSpPr>
+            <a:spLocks noGrp="1"/>
+          </p:cNvSpPr>
+          <p:nvPr>
+            <p:ph type="subTitle" idx="1" hasCustomPrompt="1"/>
+          </p:nvPr>
+        </p:nvSpPr>
+        <p:spPr>
+          <a:xfrm>
+            <a:off x="304800" y="345179"/>
+            <a:ext cx="17602200" cy="912121"/>
+          </a:xfrm>
+          <a:prstGeom prst="rect">
+            <a:avLst/>
+          </a:prstGeom>
+        </p:spPr>
+        <p:txBody>
+          <a:bodyPr/>
+          <a:lstStyle>
+            <a:lvl1pPr marL="0" indent="0" algn="ctr">
+              <a:buNone/>
+              <a:defRPr sz="5000">
+                <a:solidFill>
+                  <a:schemeClr val="tx1">
+                    <a:tint val="75000"/>
+                  </a:schemeClr>
+                </a:solidFill>
+                <a:latin typeface="Arial" panose="020B0604020202020204" pitchFamily="34" charset="0"/>
+                <a:cs typeface="Arial" panose="020B0604020202020204" pitchFamily="34" charset="0"/>
+              </a:defRPr>
+            </a:lvl1pPr>
+            <a:lvl2pPr marL="457200" indent="0" algn="ctr">
+              <a:buNone/>
+              <a:defRPr>
+                <a:solidFill>
+                  <a:schemeClr val="tx1">
+                    <a:tint val="75000"/>
+                  </a:schemeClr>
+                </a:solidFill>
+              </a:defRPr>
+            </a:lvl2pPr>
+            <a:lvl3pPr marL="914400" indent="0" algn="ctr">
+              <a:buNone/>
+              <a:defRPr>
+                <a:solidFill>
+                  <a:schemeClr val="tx1">
+                    <a:tint val="75000"/>
+                  </a:schemeClr>
+                </a:solidFill>
+              </a:defRPr>
+            </a:lvl3pPr>
+            <a:lvl4pPr marL="1371600" indent="0" algn="ctr">
+              <a:buNone/>
+              <a:defRPr>
+                <a:solidFill>
+                  <a:schemeClr val="tx1">
+                    <a:tint val="75000"/>
+                  </a:schemeClr>
+                </a:solidFill>
+              </a:defRPr>
+            </a:lvl4pPr>
+            <a:lvl5pPr marL="1828800" indent="0" algn="ctr">
+              <a:buNone/>
+              <a:defRPr>
+                <a:solidFill>
+                  <a:schemeClr val="tx1">
+                    <a:tint val="75000"/>
+                  </a:schemeClr>
+                </a:solidFill>
+              </a:defRPr>
+            </a:lvl5pPr>
+            <a:lvl6pPr marL="2286000" indent="0" algn="ctr">
+              <a:buNone/>
+              <a:defRPr>
+                <a:solidFill>
+                  <a:schemeClr val="tx1">
+                    <a:tint val="75000"/>
+                  </a:schemeClr>
+                </a:solidFill>
+              </a:defRPr>
+            </a:lvl6pPr>
+            <a:lvl7pPr marL="2743200" indent="0" algn="ctr">
+              <a:buNone/>
+              <a:defRPr>
+                <a:solidFill>
+                  <a:schemeClr val="tx1">
+                    <a:tint val="75000"/>
+                  </a:schemeClr>
+                </a:solidFill>
+              </a:defRPr>
+            </a:lvl7pPr>
+            <a:lvl8pPr marL="3200400" indent="0" algn="ctr">
+              <a:buNone/>
+              <a:defRPr>
+                <a:solidFill>
+                  <a:schemeClr val="tx1">
+                    <a:tint val="75000"/>
+                  </a:schemeClr>
+                </a:solidFill>
+              </a:defRPr>
+            </a:lvl8pPr>
+            <a:lvl9pPr marL="3657600" indent="0" algn="ctr">
+              <a:buNone/>
+              <a:defRPr>
+                <a:solidFill>
+                  <a:schemeClr val="tx1">
+                    <a:tint val="75000"/>
+                  </a:schemeClr>
+                </a:solidFill>
+              </a:defRPr>
+            </a:lvl9pPr>
+          </a:lstStyle>
+          <a:p>
+            <a:r>
+              <a:rPr lang="en-US" dirty="0" err="1"/>
+              <a:t>Título</a:t>
+            </a:r>
+            <a:r>
+              <a:rPr lang="en-US" dirty="0"/>
+              <a:t> de </a:t>
+            </a:r>
+            <a:r>
+              <a:rPr lang="en-US" dirty="0" err="1"/>
+              <a:t>Sección</a:t>
+            </a:r>
+            <a:endParaRPr lang="en-US" dirty="0"/>
+          </a:p>
+        </p:txBody>
+      </p:sp>
+      <p:sp>
+        <p:nvSpPr>
+          <p:cNvPr id="11" name="Rectangle 10">
+            <a:extLst>
+              <a:ext uri="{FF2B5EF4-FFF2-40B4-BE49-F238E27FC236}">
+                <a16:creationId xmlns:a16="http://schemas.microsoft.com/office/drawing/2014/main" id="{B1203F84-DAA9-3E86-3522-78FFBDA53D78}"/>
+              </a:ext>
+            </a:extLst>
+          </p:cNvPr>
+          <p:cNvSpPr/>
+          <p:nvPr userDrawn="1"/>
+        </p:nvSpPr>
+        <p:spPr>
+          <a:xfrm>
+            <a:off x="221876" y="1409700"/>
+            <a:ext cx="17685124" cy="45719"/>
+          </a:xfrm>
+          <a:prstGeom prst="rect">
+            <a:avLst/>
+          </a:prstGeom>
+          <a:solidFill>
+            <a:srgbClr val="044B90"/>
+          </a:solidFill>
+          <a:ln>
+            <a:solidFill>
+              <a:srgbClr val="044B90"/>
+            </a:solidFill>
+          </a:ln>
+        </p:spPr>
+        <p:style>
+          <a:lnRef idx="2">
+            <a:schemeClr val="accent1">
+              <a:shade val="15000"/>
+            </a:schemeClr>
+          </a:lnRef>
+          <a:fillRef idx="1">
+            <a:schemeClr val="accent1"/>
+          </a:fillRef>
+          <a:effectRef idx="0">
+            <a:schemeClr val="accent1"/>
+          </a:effectRef>
+          <a:fontRef idx="minor">
+            <a:schemeClr val="lt1"/>
+          </a:fontRef>
+        </p:style>
+        <p:txBody>
+          <a:bodyPr rtlCol="0" anchor="ctr"/>
+          <a:lstStyle/>
+          <a:p>
+            <a:pPr algn="ctr"/>
+            <a:endParaRPr lang="en-US"/>
+          </a:p>
+        </p:txBody>
+      </p:sp>
+    </p:spTree>
+    <p:extLst>
+      <p:ext uri="{BB962C8B-B14F-4D97-AF65-F5344CB8AC3E}">
+        <p14:creationId xmlns:p14="http://schemas.microsoft.com/office/powerpoint/2010/main" val="2489204270"/>
+      </p:ext>
+    </p:extLst>
+  </p:cSld>
+  <p:clrMapOvr>
+    <a:masterClrMapping/>
+  </p:clrMapOvr>
+</p:sldLayout>
+</file>
+
+<file path=ppt/slideLayouts/slideLayout4.xml><?xml version="1.0" encoding="utf-8"?>
+<p:sldLayout xmlns:a="http://schemas.openxmlformats.org/drawingml/2006/main" xmlns:r="http://schemas.openxmlformats.org/officeDocument/2006/relationships" xmlns:p="http://schemas.openxmlformats.org/presentationml/2006/main" preserve="1" userDrawn="1">
   <p:cSld name="Picture with Caption">
     <p:spTree>
       <p:nvGrpSpPr>
@@ -1774,7 +2000,7 @@
             <a:fld id="{1D8BD707-D9CF-40AE-B4C6-C98DA3205C09}" type="datetimeFigureOut">
               <a:rPr lang="en-US" smtClean="0"/>
               <a:pPr/>
-              <a:t>4/10/2026</a:t>
+              <a:t>4/12/2026</a:t>
             </a:fld>
             <a:endParaRPr lang="en-US" dirty="0"/>
           </a:p>
@@ -1865,7 +2091,8 @@
   <p:sldLayoutIdLst>
     <p:sldLayoutId id="2147483649" r:id="rId1"/>
     <p:sldLayoutId id="2147483655" r:id="rId2"/>
-    <p:sldLayoutId id="2147483657" r:id="rId3"/>
+    <p:sldLayoutId id="2147483658" r:id="rId3"/>
+    <p:sldLayoutId id="2147483657" r:id="rId4"/>
   </p:sldLayoutIdLst>
   <p:txStyles>
     <p:titleStyle>
@@ -2231,6 +2458,61 @@
 </file>
 
 <file path=ppt/slides/slide3.xml><?xml version="1.0" encoding="utf-8"?>
+<p:sld xmlns:a="http://schemas.openxmlformats.org/drawingml/2006/main" xmlns:r="http://schemas.openxmlformats.org/officeDocument/2006/relationships" xmlns:p="http://schemas.openxmlformats.org/presentationml/2006/main">
+  <p:cSld>
+    <p:spTree>
+      <p:nvGrpSpPr>
+        <p:cNvPr id="1" name=""/>
+        <p:cNvGrpSpPr/>
+        <p:nvPr/>
+      </p:nvGrpSpPr>
+      <p:grpSpPr>
+        <a:xfrm>
+          <a:off x="0" y="0"/>
+          <a:ext cx="0" cy="0"/>
+          <a:chOff x="0" y="0"/>
+          <a:chExt cx="0" cy="0"/>
+        </a:xfrm>
+      </p:grpSpPr>
+      <p:sp>
+        <p:nvSpPr>
+          <p:cNvPr id="3" name="Subtitle 2">
+            <a:extLst>
+              <a:ext uri="{FF2B5EF4-FFF2-40B4-BE49-F238E27FC236}">
+                <a16:creationId xmlns:a16="http://schemas.microsoft.com/office/drawing/2014/main" id="{B8C1AFFE-A3A1-6E93-86BE-19D1E1AA20F9}"/>
+              </a:ext>
+            </a:extLst>
+          </p:cNvPr>
+          <p:cNvSpPr>
+            <a:spLocks noGrp="1"/>
+          </p:cNvSpPr>
+          <p:nvPr>
+            <p:ph type="subTitle" idx="1"/>
+          </p:nvPr>
+        </p:nvSpPr>
+        <p:spPr/>
+        <p:txBody>
+          <a:bodyPr/>
+          <a:lstStyle/>
+          <a:p>
+            <a:endParaRPr lang="en-US"/>
+          </a:p>
+        </p:txBody>
+      </p:sp>
+    </p:spTree>
+    <p:extLst>
+      <p:ext uri="{BB962C8B-B14F-4D97-AF65-F5344CB8AC3E}">
+        <p14:creationId xmlns:p14="http://schemas.microsoft.com/office/powerpoint/2010/main" val="2099372960"/>
+      </p:ext>
+    </p:extLst>
+  </p:cSld>
+  <p:clrMapOvr>
+    <a:masterClrMapping/>
+  </p:clrMapOvr>
+</p:sld>
+</file>
+
+<file path=ppt/slides/slide4.xml><?xml version="1.0" encoding="utf-8"?>
 <p:sld xmlns:a="http://schemas.openxmlformats.org/drawingml/2006/main" xmlns:r="http://schemas.openxmlformats.org/officeDocument/2006/relationships" xmlns:p="http://schemas.openxmlformats.org/presentationml/2006/main">
   <p:cSld>
     <p:spTree>
